--- a/public/fun/cards/life/life-37.pptx
+++ b/public/fun/cards/life/life-37.pptx
@@ -3085,7 +3085,7 @@
     <p:bg>
       <p:bgPr>
         <a:solidFill>
-          <a:srgbClr val="FBF7EE"/>
+          <a:srgbClr val="0E1116"/>
         </a:solidFill>
         <a:effectLst/>
       </p:bgPr>
@@ -3099,72 +3099,14 @@
       <p:grpSpPr/>
       <p:sp>
         <p:nvSpPr>
-          <p:cNvPr id="2" name="Rectangle 1"/>
-          <p:cNvSpPr/>
+          <p:cNvPr id="2" name="텍스트"/>
+          <p:cNvSpPr txBox="1"/>
           <p:nvPr/>
         </p:nvSpPr>
         <p:spPr>
           <a:xfrm>
-            <a:off x="93600" y="93600"/>
-            <a:ext cx="3052800" cy="1612800"/>
-          </a:xfrm>
-          <a:prstGeom prst="rect">
-            <a:avLst/>
-          </a:prstGeom>
-          <a:noFill/>
-          <a:ln w="10800">
-            <a:solidFill>
-              <a:srgbClr val="C6992F"/>
-            </a:solidFill>
-          </a:ln>
-        </p:spPr>
-        <p:txBody>
-          <a:bodyPr rtlCol="0" anchor="ctr"/>
-          <a:lstStyle/>
-          <a:p>
-            <a:pPr algn="ctr"/>
-          </a:p>
-        </p:txBody>
-      </p:sp>
-      <p:sp>
-        <p:nvSpPr>
-          <p:cNvPr id="3" name="Rectangle 2"/>
-          <p:cNvSpPr/>
-          <p:nvPr/>
-        </p:nvSpPr>
-        <p:spPr>
-          <a:xfrm>
-            <a:off x="144000" y="144000"/>
-            <a:ext cx="2952000" cy="1512000"/>
-          </a:xfrm>
-          <a:prstGeom prst="rect">
-            <a:avLst/>
-          </a:prstGeom>
-          <a:noFill/>
-          <a:ln w="5400">
-            <a:solidFill>
-              <a:srgbClr val="F8F0DB"/>
-            </a:solidFill>
-          </a:ln>
-        </p:spPr>
-        <p:txBody>
-          <a:bodyPr rtlCol="0" anchor="ctr"/>
-          <a:lstStyle/>
-          <a:p>
-            <a:pPr algn="ctr"/>
-          </a:p>
-        </p:txBody>
-      </p:sp>
-      <p:sp>
-        <p:nvSpPr>
-          <p:cNvPr id="4" name="텍스트"/>
-          <p:cNvSpPr txBox="1"/>
-          <p:nvPr/>
-        </p:nvSpPr>
-        <p:spPr>
-          <a:xfrm>
-            <a:off x="360000" y="280800"/>
-            <a:ext cx="2520000" cy="100800"/>
+            <a:off x="252000" y="223200"/>
+            <a:ext cx="2016000" cy="133351"/>
           </a:xfrm>
           <a:prstGeom prst="rect">
             <a:avLst/>
@@ -3177,15 +3119,15 @@
           </a:bodyPr>
           <a:lstStyle/>
           <a:p>
-            <a:pPr algn="ctr">
+            <a:pPr algn="l">
               <a:lnSpc>
                 <a:spcPts val="1015"/>
               </a:lnSpc>
             </a:pPr>
             <a:r>
-              <a:rPr sz="700" b="1" spc="400">
+              <a:rPr sz="700" b="1" spc="200">
                 <a:solidFill>
-                  <a:srgbClr val="7A6C4C"/>
+                  <a:srgbClr val="A3A9B5"/>
                 </a:solidFill>
                 <a:latin typeface="맑은 고딕"/>
                 <a:ea typeface="맑은 고딕"/>
@@ -3197,14 +3139,43 @@
       </p:sp>
       <p:sp>
         <p:nvSpPr>
-          <p:cNvPr id="5" name="텍스트"/>
+          <p:cNvPr id="3" name="Oval 2"/>
+          <p:cNvSpPr/>
+          <p:nvPr/>
+        </p:nvSpPr>
+        <p:spPr>
+          <a:xfrm>
+            <a:off x="2955600" y="241200"/>
+            <a:ext cx="64800" cy="64800"/>
+          </a:xfrm>
+          <a:prstGeom prst="ellipse">
+            <a:avLst/>
+          </a:prstGeom>
+          <a:solidFill>
+            <a:srgbClr val="3A6FFF"/>
+          </a:solidFill>
+          <a:ln>
+            <a:noFill/>
+          </a:ln>
+        </p:spPr>
+        <p:txBody>
+          <a:bodyPr rtlCol="0" anchor="ctr"/>
+          <a:lstStyle/>
+          <a:p>
+            <a:pPr algn="ctr"/>
+          </a:p>
+        </p:txBody>
+      </p:sp>
+      <p:sp>
+        <p:nvSpPr>
+          <p:cNvPr id="4" name="텍스트"/>
           <p:cNvSpPr txBox="1"/>
           <p:nvPr/>
         </p:nvSpPr>
         <p:spPr>
           <a:xfrm>
-            <a:off x="360000" y="468000"/>
-            <a:ext cx="2520000" cy="313692"/>
+            <a:off x="252000" y="676800"/>
+            <a:ext cx="2520000" cy="360000"/>
           </a:xfrm>
           <a:prstGeom prst="rect">
             <a:avLst/>
@@ -3217,18 +3188,18 @@
           </a:bodyPr>
           <a:lstStyle/>
           <a:p>
-            <a:pPr algn="ctr">
+            <a:pPr algn="l">
               <a:lnSpc>
-                <a:spcPts val="2755"/>
+                <a:spcPts val="3190"/>
               </a:lnSpc>
             </a:pPr>
             <a:r>
-              <a:rPr sz="1900" b="1" spc="50">
+              <a:rPr sz="2200" b="1">
                 <a:solidFill>
-                  <a:srgbClr val="74591B"/>
+                  <a:srgbClr val="FFFFFF"/>
                 </a:solidFill>
-                <a:latin typeface="바탕"/>
-                <a:ea typeface="바탕"/>
+                <a:latin typeface="맑은 고딕"/>
+                <a:ea typeface="맑은 고딕"/>
               </a:rPr>
               <a:t>방지민</a:t>
             </a:r>
@@ -3237,14 +3208,14 @@
       </p:sp>
       <p:sp>
         <p:nvSpPr>
-          <p:cNvPr id="6" name="텍스트"/>
+          <p:cNvPr id="5" name="텍스트"/>
           <p:cNvSpPr txBox="1"/>
           <p:nvPr/>
         </p:nvSpPr>
         <p:spPr>
           <a:xfrm>
-            <a:off x="360000" y="784800"/>
-            <a:ext cx="2520000" cy="122400"/>
+            <a:off x="252000" y="1080000"/>
+            <a:ext cx="2520000" cy="171451"/>
           </a:xfrm>
           <a:prstGeom prst="rect">
             <a:avLst/>
@@ -3257,15 +3228,15 @@
           </a:bodyPr>
           <a:lstStyle/>
           <a:p>
-            <a:pPr algn="ctr">
+            <a:pPr algn="l">
               <a:lnSpc>
-                <a:spcPts val="1232"/>
+                <a:spcPts val="1305"/>
               </a:lnSpc>
             </a:pPr>
             <a:r>
-              <a:rPr sz="850" b="1">
+              <a:rPr sz="900" b="0">
                 <a:solidFill>
-                  <a:srgbClr val="8B6B21"/>
+                  <a:srgbClr val="A3A9B5"/>
                 </a:solidFill>
                 <a:latin typeface="맑은 고딕"/>
                 <a:ea typeface="맑은 고딕"/>
@@ -3275,45 +3246,37 @@
           </a:p>
         </p:txBody>
       </p:sp>
-      <p:sp>
-        <p:nvSpPr>
-          <p:cNvPr id="7" name="Rectangle 6"/>
-          <p:cNvSpPr/>
+      <p:cxnSp>
+        <p:nvCxnSpPr>
+          <p:cNvPr id="6" name="Connector 5"/>
+          <p:cNvCxnSpPr/>
           <p:nvPr/>
-        </p:nvSpPr>
+        </p:nvCxnSpPr>
         <p:spPr>
           <a:xfrm>
-            <a:off x="1530000" y="993600"/>
-            <a:ext cx="180000" cy="10800"/>
+            <a:off x="252000" y="1339200"/>
+            <a:ext cx="2736000" cy="0"/>
           </a:xfrm>
-          <a:prstGeom prst="rect">
+          <a:prstGeom prst="line">
             <a:avLst/>
           </a:prstGeom>
-          <a:solidFill>
-            <a:srgbClr val="C6992F"/>
-          </a:solidFill>
-          <a:ln>
-            <a:noFill/>
+          <a:ln w="5760">
+            <a:solidFill>
+              <a:srgbClr val="2A2F38"/>
+            </a:solidFill>
           </a:ln>
         </p:spPr>
-        <p:txBody>
-          <a:bodyPr rtlCol="0" anchor="ctr"/>
-          <a:lstStyle/>
-          <a:p>
-            <a:pPr algn="ctr"/>
-          </a:p>
-        </p:txBody>
-      </p:sp>
-      <p:sp>
-        <p:nvSpPr>
-          <p:cNvPr id="8" name="텍스트"/>
+      </p:cxnSp>
+      <p:sp>
+        <p:nvSpPr>
+          <p:cNvPr id="7" name="텍스트"/>
           <p:cNvSpPr txBox="1"/>
           <p:nvPr/>
         </p:nvSpPr>
         <p:spPr>
           <a:xfrm>
-            <a:off x="360000" y="1087200"/>
-            <a:ext cx="2520000" cy="108000"/>
+            <a:off x="252000" y="1411200"/>
+            <a:ext cx="792000" cy="129541"/>
           </a:xfrm>
           <a:prstGeom prst="rect">
             <a:avLst/>
@@ -3326,15 +3289,15 @@
           </a:bodyPr>
           <a:lstStyle/>
           <a:p>
-            <a:pPr algn="ctr">
+            <a:pPr algn="l">
               <a:lnSpc>
-                <a:spcPts val="1087"/>
+                <a:spcPts val="986"/>
               </a:lnSpc>
             </a:pPr>
             <a:r>
-              <a:rPr sz="750" b="0">
+              <a:rPr sz="680" b="0">
                 <a:solidFill>
-                  <a:srgbClr val="74591B"/>
+                  <a:srgbClr val="FFFFFF"/>
                 </a:solidFill>
                 <a:latin typeface="맑은 고딕"/>
                 <a:ea typeface="맑은 고딕"/>
@@ -3346,14 +3309,14 @@
       </p:sp>
       <p:sp>
         <p:nvSpPr>
-          <p:cNvPr id="9" name="텍스트"/>
+          <p:cNvPr id="8" name="텍스트"/>
           <p:cNvSpPr txBox="1"/>
           <p:nvPr/>
         </p:nvSpPr>
         <p:spPr>
           <a:xfrm>
-            <a:off x="360000" y="1209600"/>
-            <a:ext cx="2520000" cy="108000"/>
+            <a:off x="1080000" y="1411200"/>
+            <a:ext cx="900000" cy="129541"/>
           </a:xfrm>
           <a:prstGeom prst="rect">
             <a:avLst/>
@@ -3366,15 +3329,15 @@
           </a:bodyPr>
           <a:lstStyle/>
           <a:p>
-            <a:pPr algn="ctr">
+            <a:pPr algn="l">
               <a:lnSpc>
-                <a:spcPts val="1087"/>
+                <a:spcPts val="986"/>
               </a:lnSpc>
             </a:pPr>
             <a:r>
-              <a:rPr sz="750" b="0">
+              <a:rPr sz="680" b="0">
                 <a:solidFill>
-                  <a:srgbClr val="74591B"/>
+                  <a:srgbClr val="FFFFFF"/>
                 </a:solidFill>
                 <a:latin typeface="맑은 고딕"/>
                 <a:ea typeface="맑은 고딕"/>
@@ -3386,14 +3349,14 @@
       </p:sp>
       <p:sp>
         <p:nvSpPr>
-          <p:cNvPr id="10" name="텍스트"/>
+          <p:cNvPr id="9" name="텍스트"/>
           <p:cNvSpPr txBox="1"/>
           <p:nvPr/>
         </p:nvSpPr>
         <p:spPr>
           <a:xfrm>
-            <a:off x="360000" y="1332000"/>
-            <a:ext cx="2520000" cy="108000"/>
+            <a:off x="2052000" y="1411200"/>
+            <a:ext cx="972000" cy="129541"/>
           </a:xfrm>
           <a:prstGeom prst="rect">
             <a:avLst/>
@@ -3406,15 +3369,15 @@
           </a:bodyPr>
           <a:lstStyle/>
           <a:p>
-            <a:pPr algn="ctr">
+            <a:pPr algn="l">
               <a:lnSpc>
-                <a:spcPts val="1015"/>
+                <a:spcPts val="986"/>
               </a:lnSpc>
             </a:pPr>
             <a:r>
-              <a:rPr sz="700" b="0">
+              <a:rPr sz="680" b="0">
                 <a:solidFill>
-                  <a:srgbClr val="7A6C4C"/>
+                  <a:srgbClr val="FFFFFF"/>
                 </a:solidFill>
                 <a:latin typeface="맑은 고딕"/>
                 <a:ea typeface="맑은 고딕"/>
@@ -3426,106 +3389,121 @@
       </p:sp>
       <p:sp>
         <p:nvSpPr>
-          <p:cNvPr id="11" name="Freeform 10"/>
-          <p:cNvSpPr/>
+          <p:cNvPr id="10" name="텍스트"/>
+          <p:cNvSpPr txBox="1"/>
           <p:nvPr/>
         </p:nvSpPr>
         <p:spPr>
           <a:xfrm>
-            <a:off x="1557072" y="1490544"/>
-            <a:ext cx="125856" cy="57456"/>
-          </a:xfrm>
-          <a:custGeom>
-            <a:avLst/>
-            <a:gdLst/>
-            <a:ahLst/>
-            <a:cxnLst/>
-            <a:rect l="l" t="t" r="r" b="b"/>
-            <a:pathLst>
-              <a:path w="125856" h="57456">
-                <a:moveTo>
-                  <a:pt x="0" y="57456"/>
-                </a:moveTo>
-                <a:lnTo>
-                  <a:pt x="62928" y="0"/>
-                </a:lnTo>
-                <a:lnTo>
-                  <a:pt x="125856" y="57456"/>
-                </a:lnTo>
-                <a:close/>
-              </a:path>
-            </a:pathLst>
-          </a:custGeom>
-          <a:solidFill>
-            <a:srgbClr val="C6992F"/>
-          </a:solidFill>
-          <a:ln>
-            <a:noFill/>
-          </a:ln>
-        </p:spPr>
-        <p:txBody>
-          <a:bodyPr rtlCol="0" anchor="ctr"/>
-          <a:lstStyle/>
-          <a:p>
-            <a:pPr algn="ctr"/>
-          </a:p>
-        </p:txBody>
-      </p:sp>
-      <p:sp>
-        <p:nvSpPr>
-          <p:cNvPr id="12" name="Rectangle 11"/>
-          <p:cNvSpPr/>
-          <p:nvPr/>
-        </p:nvSpPr>
-        <p:spPr>
-          <a:xfrm>
-            <a:off x="1576224" y="1548000"/>
-            <a:ext cx="87552" cy="57456"/>
+            <a:off x="252000" y="1526400"/>
+            <a:ext cx="216000" cy="95251"/>
           </a:xfrm>
           <a:prstGeom prst="rect">
             <a:avLst/>
           </a:prstGeom>
-          <a:solidFill>
-            <a:srgbClr val="F8F0DB"/>
-          </a:solidFill>
-          <a:ln>
-            <a:noFill/>
-          </a:ln>
+          <a:noFill/>
         </p:spPr>
         <p:txBody>
-          <a:bodyPr rtlCol="0" anchor="ctr"/>
-          <a:lstStyle/>
-          <a:p>
-            <a:pPr algn="ctr"/>
-          </a:p>
-        </p:txBody>
-      </p:sp>
-      <p:sp>
-        <p:nvSpPr>
-          <p:cNvPr id="13" name="Rectangle 12"/>
-          <p:cNvSpPr/>
+          <a:bodyPr wrap="square" lIns="0" rIns="0" tIns="0" bIns="0" anchor="t">
+            <a:spAutoFit/>
+          </a:bodyPr>
+          <a:lstStyle/>
+          <a:p>
+            <a:pPr algn="l">
+              <a:lnSpc>
+                <a:spcPts val="725"/>
+              </a:lnSpc>
+            </a:pPr>
+            <a:r>
+              <a:rPr sz="500" b="1" spc="120">
+                <a:solidFill>
+                  <a:srgbClr val="A3A9B5"/>
+                </a:solidFill>
+                <a:latin typeface="맑은 고딕"/>
+                <a:ea typeface="맑은 고딕"/>
+              </a:rPr>
+              <a:t>TEL</a:t>
+            </a:r>
+          </a:p>
+        </p:txBody>
+      </p:sp>
+      <p:sp>
+        <p:nvSpPr>
+          <p:cNvPr id="11" name="텍스트"/>
+          <p:cNvSpPr txBox="1"/>
           <p:nvPr/>
         </p:nvSpPr>
         <p:spPr>
           <a:xfrm>
-            <a:off x="1609056" y="1567152"/>
-            <a:ext cx="21888" cy="38304"/>
+            <a:off x="1080000" y="1526400"/>
+            <a:ext cx="216000" cy="95251"/>
           </a:xfrm>
           <a:prstGeom prst="rect">
             <a:avLst/>
           </a:prstGeom>
-          <a:solidFill>
-            <a:srgbClr val="C6992F"/>
-          </a:solidFill>
-          <a:ln>
-            <a:noFill/>
-          </a:ln>
+          <a:noFill/>
         </p:spPr>
         <p:txBody>
-          <a:bodyPr rtlCol="0" anchor="ctr"/>
-          <a:lstStyle/>
-          <a:p>
-            <a:pPr algn="ctr"/>
+          <a:bodyPr wrap="square" lIns="0" rIns="0" tIns="0" bIns="0" anchor="t">
+            <a:spAutoFit/>
+          </a:bodyPr>
+          <a:lstStyle/>
+          <a:p>
+            <a:pPr algn="l">
+              <a:lnSpc>
+                <a:spcPts val="725"/>
+              </a:lnSpc>
+            </a:pPr>
+            <a:r>
+              <a:rPr sz="500" b="1" spc="120">
+                <a:solidFill>
+                  <a:srgbClr val="A3A9B5"/>
+                </a:solidFill>
+                <a:latin typeface="맑은 고딕"/>
+                <a:ea typeface="맑은 고딕"/>
+              </a:rPr>
+              <a:t>MAIL</a:t>
+            </a:r>
+          </a:p>
+        </p:txBody>
+      </p:sp>
+      <p:sp>
+        <p:nvSpPr>
+          <p:cNvPr id="12" name="텍스트"/>
+          <p:cNvSpPr txBox="1"/>
+          <p:nvPr/>
+        </p:nvSpPr>
+        <p:spPr>
+          <a:xfrm>
+            <a:off x="2052000" y="1526400"/>
+            <a:ext cx="216000" cy="95251"/>
+          </a:xfrm>
+          <a:prstGeom prst="rect">
+            <a:avLst/>
+          </a:prstGeom>
+          <a:noFill/>
+        </p:spPr>
+        <p:txBody>
+          <a:bodyPr wrap="square" lIns="0" rIns="0" tIns="0" bIns="0" anchor="t">
+            <a:spAutoFit/>
+          </a:bodyPr>
+          <a:lstStyle/>
+          <a:p>
+            <a:pPr algn="l">
+              <a:lnSpc>
+                <a:spcPts val="725"/>
+              </a:lnSpc>
+            </a:pPr>
+            <a:r>
+              <a:rPr sz="500" b="1" spc="120">
+                <a:solidFill>
+                  <a:srgbClr val="A3A9B5"/>
+                </a:solidFill>
+                <a:latin typeface="맑은 고딕"/>
+                <a:ea typeface="맑은 고딕"/>
+              </a:rPr>
+              <a:t>ADDR</a:t>
+            </a:r>
           </a:p>
         </p:txBody>
       </p:sp>
@@ -3543,7 +3521,7 @@
     <p:bg>
       <p:bgPr>
         <a:solidFill>
-          <a:srgbClr val="74591B"/>
+          <a:srgbClr val="0E1116"/>
         </a:solidFill>
         <a:effectLst/>
       </p:bgPr>
@@ -3563,17 +3541,18 @@
         </p:nvSpPr>
         <p:spPr>
           <a:xfrm>
-            <a:off x="108000" y="108000"/>
-            <a:ext cx="3024000" cy="1584000"/>
+            <a:off x="2304000" y="504000"/>
+            <a:ext cx="684000" cy="684000"/>
           </a:xfrm>
           <a:prstGeom prst="rect">
             <a:avLst/>
           </a:prstGeom>
           <a:noFill/>
-          <a:ln w="10800">
+          <a:ln w="7200">
             <a:solidFill>
-              <a:srgbClr val="D6B669"/>
+              <a:srgbClr val="A3A9B5"/>
             </a:solidFill>
+            <a:prstDash val="dash"/>
           </a:ln>
         </p:spPr>
         <p:txBody>
@@ -3592,8 +3571,8 @@
         </p:nvSpPr>
         <p:spPr>
           <a:xfrm>
-            <a:off x="396000" y="504000"/>
-            <a:ext cx="2448000" cy="432000"/>
+            <a:off x="2304000" y="504000"/>
+            <a:ext cx="684000" cy="684000"/>
           </a:xfrm>
           <a:prstGeom prst="rect">
             <a:avLst/>
@@ -3607,6 +3586,46 @@
           <a:lstStyle/>
           <a:p>
             <a:pPr algn="ctr">
+              <a:lnSpc>
+                <a:spcPts val="1595"/>
+              </a:lnSpc>
+            </a:pPr>
+            <a:r>
+              <a:rPr sz="1100" b="1">
+                <a:solidFill>
+                  <a:srgbClr val="A3A9B5"/>
+                </a:solidFill>
+                <a:latin typeface="맑은 고딕"/>
+                <a:ea typeface="맑은 고딕"/>
+              </a:rPr>
+              <a:t>QR</a:t>
+            </a:r>
+          </a:p>
+        </p:txBody>
+      </p:sp>
+      <p:sp>
+        <p:nvSpPr>
+          <p:cNvPr id="4" name="텍스트"/>
+          <p:cNvSpPr txBox="1"/>
+          <p:nvPr/>
+        </p:nvSpPr>
+        <p:spPr>
+          <a:xfrm>
+            <a:off x="252000" y="504000"/>
+            <a:ext cx="1728000" cy="720000"/>
+          </a:xfrm>
+          <a:prstGeom prst="rect">
+            <a:avLst/>
+          </a:prstGeom>
+          <a:noFill/>
+        </p:spPr>
+        <p:txBody>
+          <a:bodyPr wrap="square" lIns="0" rIns="0" tIns="0" bIns="0" anchor="t">
+            <a:spAutoFit/>
+          </a:bodyPr>
+          <a:lstStyle/>
+          <a:p>
+            <a:pPr algn="l">
               <a:lnSpc>
                 <a:spcPts val="1739"/>
               </a:lnSpc>
@@ -3619,48 +3638,44 @@
                 <a:latin typeface="맑은 고딕"/>
                 <a:ea typeface="맑은 고딕"/>
               </a:rPr>
-              <a:t>오래된 인연처럼 편안한 곳</a:t>
-            </a:r>
-          </a:p>
-        </p:txBody>
-      </p:sp>
-      <p:cxnSp>
-        <p:nvCxnSpPr>
-          <p:cNvPr id="4" name="Connector 3"/>
-          <p:cNvCxnSpPr/>
+              <a:t>오래된 인연처럼</a:t>
+            </a:r>
+          </a:p>
+          <a:p>
+            <a:pPr algn="l">
+              <a:lnSpc>
+                <a:spcPts val="1739"/>
+              </a:lnSpc>
+            </a:pPr>
+            <a:r>
+              <a:rPr sz="1200" b="1">
+                <a:solidFill>
+                  <a:srgbClr val="FFFFFF"/>
+                </a:solidFill>
+                <a:latin typeface="맑은 고딕"/>
+                <a:ea typeface="맑은 고딕"/>
+              </a:rPr>
+              <a:t>편안한 곳</a:t>
+            </a:r>
+          </a:p>
+        </p:txBody>
+      </p:sp>
+      <p:sp>
+        <p:nvSpPr>
+          <p:cNvPr id="5" name="Rectangle 4"/>
+          <p:cNvSpPr/>
           <p:nvPr/>
-        </p:nvCxnSpPr>
+        </p:nvSpPr>
         <p:spPr>
           <a:xfrm>
-            <a:off x="1260000" y="1080000"/>
-            <a:ext cx="684000" cy="0"/>
+            <a:off x="252000" y="1296000"/>
+            <a:ext cx="144000" cy="18000"/>
           </a:xfrm>
-          <a:prstGeom prst="line">
-            <a:avLst/>
-          </a:prstGeom>
-          <a:ln w="7200">
-            <a:solidFill>
-              <a:srgbClr val="D6B669"/>
-            </a:solidFill>
-          </a:ln>
-        </p:spPr>
-      </p:cxnSp>
-      <p:sp>
-        <p:nvSpPr>
-          <p:cNvPr id="5" name="Oval 4"/>
-          <p:cNvSpPr/>
-          <p:nvPr/>
-        </p:nvSpPr>
-        <p:spPr>
-          <a:xfrm>
-            <a:off x="1594800" y="1054800"/>
-            <a:ext cx="50400" cy="50400"/>
-          </a:xfrm>
-          <a:prstGeom prst="ellipse">
+          <a:prstGeom prst="rect">
             <a:avLst/>
           </a:prstGeom>
           <a:solidFill>
-            <a:srgbClr val="D6B669"/>
+            <a:srgbClr val="3A6FFF"/>
           </a:solidFill>
           <a:ln>
             <a:noFill/>
@@ -3682,8 +3697,8 @@
         </p:nvSpPr>
         <p:spPr>
           <a:xfrm>
-            <a:off x="360000" y="1224000"/>
-            <a:ext cx="2520000" cy="108000"/>
+            <a:off x="252000" y="1404000"/>
+            <a:ext cx="1656000" cy="133351"/>
           </a:xfrm>
           <a:prstGeom prst="rect">
             <a:avLst/>
@@ -3696,126 +3711,21 @@
           </a:bodyPr>
           <a:lstStyle/>
           <a:p>
-            <a:pPr algn="ctr">
+            <a:pPr algn="l">
               <a:lnSpc>
-                <a:spcPts val="1087"/>
+                <a:spcPts val="1015"/>
               </a:lnSpc>
             </a:pPr>
             <a:r>
-              <a:rPr sz="750" b="1" spc="300">
+              <a:rPr sz="700" b="1" spc="200">
                 <a:solidFill>
-                  <a:srgbClr val="DDD6C7"/>
+                  <a:srgbClr val="A3A9B5"/>
                 </a:solidFill>
                 <a:latin typeface="맑은 고딕"/>
                 <a:ea typeface="맑은 고딕"/>
               </a:rPr>
               <a:t>상호명</a:t>
             </a:r>
-          </a:p>
-        </p:txBody>
-      </p:sp>
-      <p:sp>
-        <p:nvSpPr>
-          <p:cNvPr id="7" name="Freeform 6"/>
-          <p:cNvSpPr/>
-          <p:nvPr/>
-        </p:nvSpPr>
-        <p:spPr>
-          <a:xfrm>
-            <a:off x="1537200" y="248400"/>
-            <a:ext cx="165600" cy="75600"/>
-          </a:xfrm>
-          <a:custGeom>
-            <a:avLst/>
-            <a:gdLst/>
-            <a:ahLst/>
-            <a:cxnLst/>
-            <a:rect l="l" t="t" r="r" b="b"/>
-            <a:pathLst>
-              <a:path w="165600" h="75600">
-                <a:moveTo>
-                  <a:pt x="0" y="75600"/>
-                </a:moveTo>
-                <a:lnTo>
-                  <a:pt x="82800" y="0"/>
-                </a:lnTo>
-                <a:lnTo>
-                  <a:pt x="165600" y="75600"/>
-                </a:lnTo>
-                <a:close/>
-              </a:path>
-            </a:pathLst>
-          </a:custGeom>
-          <a:solidFill>
-            <a:srgbClr val="D6B669"/>
-          </a:solidFill>
-          <a:ln>
-            <a:noFill/>
-          </a:ln>
-        </p:spPr>
-        <p:txBody>
-          <a:bodyPr rtlCol="0" anchor="ctr"/>
-          <a:lstStyle/>
-          <a:p>
-            <a:pPr algn="ctr"/>
-          </a:p>
-        </p:txBody>
-      </p:sp>
-      <p:sp>
-        <p:nvSpPr>
-          <p:cNvPr id="8" name="Rectangle 7"/>
-          <p:cNvSpPr/>
-          <p:nvPr/>
-        </p:nvSpPr>
-        <p:spPr>
-          <a:xfrm>
-            <a:off x="1562400" y="324000"/>
-            <a:ext cx="115200" cy="75600"/>
-          </a:xfrm>
-          <a:prstGeom prst="rect">
-            <a:avLst/>
-          </a:prstGeom>
-          <a:solidFill>
-            <a:srgbClr val="8A743F"/>
-          </a:solidFill>
-          <a:ln>
-            <a:noFill/>
-          </a:ln>
-        </p:spPr>
-        <p:txBody>
-          <a:bodyPr rtlCol="0" anchor="ctr"/>
-          <a:lstStyle/>
-          <a:p>
-            <a:pPr algn="ctr"/>
-          </a:p>
-        </p:txBody>
-      </p:sp>
-      <p:sp>
-        <p:nvSpPr>
-          <p:cNvPr id="9" name="Rectangle 8"/>
-          <p:cNvSpPr/>
-          <p:nvPr/>
-        </p:nvSpPr>
-        <p:spPr>
-          <a:xfrm>
-            <a:off x="1605600" y="349200"/>
-            <a:ext cx="28800" cy="50400"/>
-          </a:xfrm>
-          <a:prstGeom prst="rect">
-            <a:avLst/>
-          </a:prstGeom>
-          <a:solidFill>
-            <a:srgbClr val="D6B669"/>
-          </a:solidFill>
-          <a:ln>
-            <a:noFill/>
-          </a:ln>
-        </p:spPr>
-        <p:txBody>
-          <a:bodyPr rtlCol="0" anchor="ctr"/>
-          <a:lstStyle/>
-          <a:p>
-            <a:pPr algn="ctr"/>
           </a:p>
         </p:txBody>
       </p:sp>

--- a/public/fun/cards/life/life-37.pptx
+++ b/public/fun/cards/life/life-37.pptx
@@ -3099,56 +3099,45 @@
       <p:grpSpPr/>
       <p:sp>
         <p:nvSpPr>
-          <p:cNvPr id="2" name="텍스트"/>
-          <p:cNvSpPr txBox="1"/>
+          <p:cNvPr id="2" name="Rectangle 1"/>
+          <p:cNvSpPr/>
           <p:nvPr/>
         </p:nvSpPr>
         <p:spPr>
           <a:xfrm>
-            <a:off x="252000" y="223200"/>
-            <a:ext cx="2016000" cy="133351"/>
+            <a:off x="93600" y="93600"/>
+            <a:ext cx="3052800" cy="1612800"/>
           </a:xfrm>
           <a:prstGeom prst="rect">
             <a:avLst/>
           </a:prstGeom>
           <a:noFill/>
-        </p:spPr>
-        <p:txBody>
-          <a:bodyPr wrap="square" lIns="0" rIns="0" tIns="0" bIns="0" anchor="t">
-            <a:spAutoFit/>
-          </a:bodyPr>
-          <a:lstStyle/>
-          <a:p>
-            <a:pPr algn="l">
-              <a:lnSpc>
-                <a:spcPts val="1015"/>
-              </a:lnSpc>
-            </a:pPr>
-            <a:r>
-              <a:rPr sz="700" b="1" spc="200">
-                <a:solidFill>
-                  <a:srgbClr val="A3A9B5"/>
-                </a:solidFill>
-                <a:latin typeface="맑은 고딕"/>
-                <a:ea typeface="맑은 고딕"/>
-              </a:rPr>
-              <a:t>상호명</a:t>
-            </a:r>
-          </a:p>
-        </p:txBody>
-      </p:sp>
-      <p:sp>
-        <p:nvSpPr>
-          <p:cNvPr id="3" name="Oval 2"/>
+          <a:ln w="3600">
+            <a:solidFill>
+              <a:srgbClr val="2A2F38"/>
+            </a:solidFill>
+          </a:ln>
+        </p:spPr>
+        <p:txBody>
+          <a:bodyPr rtlCol="0" anchor="ctr"/>
+          <a:lstStyle/>
+          <a:p>
+            <a:pPr algn="ctr"/>
+          </a:p>
+        </p:txBody>
+      </p:sp>
+      <p:sp>
+        <p:nvSpPr>
+          <p:cNvPr id="3" name="Rectangle 2"/>
           <p:cNvSpPr/>
           <p:nvPr/>
         </p:nvSpPr>
         <p:spPr>
           <a:xfrm>
-            <a:off x="2955600" y="241200"/>
-            <a:ext cx="64800" cy="64800"/>
-          </a:xfrm>
-          <a:prstGeom prst="ellipse">
+            <a:off x="252000" y="252000"/>
+            <a:ext cx="79200" cy="79200"/>
+          </a:xfrm>
+          <a:prstGeom prst="rect">
             <a:avLst/>
           </a:prstGeom>
           <a:solidFill>
@@ -3174,8 +3163,8 @@
         </p:nvSpPr>
         <p:spPr>
           <a:xfrm>
-            <a:off x="252000" y="676800"/>
-            <a:ext cx="2520000" cy="360000"/>
+            <a:off x="396000" y="259200"/>
+            <a:ext cx="1512000" cy="123826"/>
           </a:xfrm>
           <a:prstGeom prst="rect">
             <a:avLst/>
@@ -3190,11 +3179,72 @@
           <a:p>
             <a:pPr algn="l">
               <a:lnSpc>
-                <a:spcPts val="3190"/>
+                <a:spcPts val="942"/>
               </a:lnSpc>
             </a:pPr>
             <a:r>
-              <a:rPr sz="2200" b="1">
+              <a:rPr sz="650" b="1" spc="220">
+                <a:solidFill>
+                  <a:srgbClr val="A3A9B5"/>
+                </a:solidFill>
+                <a:latin typeface="맑은 고딕"/>
+                <a:ea typeface="맑은 고딕"/>
+              </a:rPr>
+              <a:t>상호명</a:t>
+            </a:r>
+          </a:p>
+        </p:txBody>
+      </p:sp>
+      <p:cxnSp>
+        <p:nvCxnSpPr>
+          <p:cNvPr id="5" name="Connector 4"/>
+          <p:cNvCxnSpPr/>
+          <p:nvPr/>
+        </p:nvCxnSpPr>
+        <p:spPr>
+          <a:xfrm>
+            <a:off x="252000" y="446400"/>
+            <a:ext cx="2736000" cy="0"/>
+          </a:xfrm>
+          <a:prstGeom prst="line">
+            <a:avLst/>
+          </a:prstGeom>
+          <a:ln w="3600">
+            <a:solidFill>
+              <a:srgbClr val="2A2F38"/>
+            </a:solidFill>
+          </a:ln>
+        </p:spPr>
+      </p:cxnSp>
+      <p:sp>
+        <p:nvSpPr>
+          <p:cNvPr id="6" name="텍스트"/>
+          <p:cNvSpPr txBox="1"/>
+          <p:nvPr/>
+        </p:nvSpPr>
+        <p:spPr>
+          <a:xfrm>
+            <a:off x="252000" y="964800"/>
+            <a:ext cx="1800000" cy="237600"/>
+          </a:xfrm>
+          <a:prstGeom prst="rect">
+            <a:avLst/>
+          </a:prstGeom>
+          <a:noFill/>
+        </p:spPr>
+        <p:txBody>
+          <a:bodyPr wrap="square" lIns="0" rIns="0" tIns="0" bIns="0" anchor="t">
+            <a:spAutoFit/>
+          </a:bodyPr>
+          <a:lstStyle/>
+          <a:p>
+            <a:pPr algn="l">
+              <a:lnSpc>
+                <a:spcPts val="1957"/>
+              </a:lnSpc>
+            </a:pPr>
+            <a:r>
+              <a:rPr sz="1350" b="1" spc="120">
                 <a:solidFill>
                   <a:srgbClr val="FFFFFF"/>
                 </a:solidFill>
@@ -3208,14 +3258,14 @@
       </p:sp>
       <p:sp>
         <p:nvSpPr>
-          <p:cNvPr id="5" name="텍스트"/>
+          <p:cNvPr id="7" name="텍스트"/>
           <p:cNvSpPr txBox="1"/>
           <p:nvPr/>
         </p:nvSpPr>
         <p:spPr>
           <a:xfrm>
-            <a:off x="252000" y="1080000"/>
-            <a:ext cx="2520000" cy="171451"/>
+            <a:off x="252000" y="1216800"/>
+            <a:ext cx="1800000" cy="133351"/>
           </a:xfrm>
           <a:prstGeom prst="rect">
             <a:avLst/>
@@ -3230,11 +3280,11 @@
           <a:p>
             <a:pPr algn="l">
               <a:lnSpc>
-                <a:spcPts val="1305"/>
+                <a:spcPts val="1015"/>
               </a:lnSpc>
             </a:pPr>
             <a:r>
-              <a:rPr sz="900" b="0">
+              <a:rPr sz="700" b="0" spc="60">
                 <a:solidFill>
                   <a:srgbClr val="A3A9B5"/>
                 </a:solidFill>
@@ -3248,19 +3298,19 @@
       </p:sp>
       <p:cxnSp>
         <p:nvCxnSpPr>
-          <p:cNvPr id="6" name="Connector 5"/>
+          <p:cNvPr id="8" name="Connector 7"/>
           <p:cNvCxnSpPr/>
           <p:nvPr/>
         </p:nvCxnSpPr>
         <p:spPr>
           <a:xfrm>
-            <a:off x="252000" y="1339200"/>
-            <a:ext cx="2736000" cy="0"/>
+            <a:off x="1872000" y="943200"/>
+            <a:ext cx="0" cy="604800"/>
           </a:xfrm>
           <a:prstGeom prst="line">
             <a:avLst/>
           </a:prstGeom>
-          <a:ln w="5760">
+          <a:ln w="3600">
             <a:solidFill>
               <a:srgbClr val="2A2F38"/>
             </a:solidFill>
@@ -3269,14 +3319,14 @@
       </p:cxnSp>
       <p:sp>
         <p:nvSpPr>
-          <p:cNvPr id="7" name="텍스트"/>
+          <p:cNvPr id="9" name="텍스트"/>
           <p:cNvSpPr txBox="1"/>
           <p:nvPr/>
         </p:nvSpPr>
         <p:spPr>
           <a:xfrm>
-            <a:off x="252000" y="1411200"/>
-            <a:ext cx="792000" cy="129541"/>
+            <a:off x="2016000" y="1033200"/>
+            <a:ext cx="302400" cy="91441"/>
           </a:xfrm>
           <a:prstGeom prst="rect">
             <a:avLst/>
@@ -3291,11 +3341,51 @@
           <a:p>
             <a:pPr algn="l">
               <a:lnSpc>
-                <a:spcPts val="986"/>
+                <a:spcPts val="696"/>
               </a:lnSpc>
             </a:pPr>
             <a:r>
-              <a:rPr sz="680" b="0">
+              <a:rPr sz="480" b="1" spc="140">
+                <a:solidFill>
+                  <a:srgbClr val="A3A9B5"/>
+                </a:solidFill>
+                <a:latin typeface="맑은 고딕"/>
+                <a:ea typeface="맑은 고딕"/>
+              </a:rPr>
+              <a:t>TEL</a:t>
+            </a:r>
+          </a:p>
+        </p:txBody>
+      </p:sp>
+      <p:sp>
+        <p:nvSpPr>
+          <p:cNvPr id="10" name="텍스트"/>
+          <p:cNvSpPr txBox="1"/>
+          <p:nvPr/>
+        </p:nvSpPr>
+        <p:spPr>
+          <a:xfrm>
+            <a:off x="2318400" y="1022400"/>
+            <a:ext cx="972000" cy="123826"/>
+          </a:xfrm>
+          <a:prstGeom prst="rect">
+            <a:avLst/>
+          </a:prstGeom>
+          <a:noFill/>
+        </p:spPr>
+        <p:txBody>
+          <a:bodyPr wrap="square" lIns="0" rIns="0" tIns="0" bIns="0" anchor="t">
+            <a:spAutoFit/>
+          </a:bodyPr>
+          <a:lstStyle/>
+          <a:p>
+            <a:pPr algn="l">
+              <a:lnSpc>
+                <a:spcPts val="942"/>
+              </a:lnSpc>
+            </a:pPr>
+            <a:r>
+              <a:rPr sz="650" b="0">
                 <a:solidFill>
                   <a:srgbClr val="FFFFFF"/>
                 </a:solidFill>
@@ -3309,14 +3399,14 @@
       </p:sp>
       <p:sp>
         <p:nvSpPr>
-          <p:cNvPr id="8" name="텍스트"/>
+          <p:cNvPr id="11" name="텍스트"/>
           <p:cNvSpPr txBox="1"/>
           <p:nvPr/>
         </p:nvSpPr>
         <p:spPr>
           <a:xfrm>
-            <a:off x="1080000" y="1411200"/>
-            <a:ext cx="900000" cy="129541"/>
+            <a:off x="2016000" y="1177200"/>
+            <a:ext cx="302400" cy="91441"/>
           </a:xfrm>
           <a:prstGeom prst="rect">
             <a:avLst/>
@@ -3331,11 +3421,51 @@
           <a:p>
             <a:pPr algn="l">
               <a:lnSpc>
-                <a:spcPts val="986"/>
+                <a:spcPts val="696"/>
               </a:lnSpc>
             </a:pPr>
             <a:r>
-              <a:rPr sz="680" b="0">
+              <a:rPr sz="480" b="1" spc="140">
+                <a:solidFill>
+                  <a:srgbClr val="A3A9B5"/>
+                </a:solidFill>
+                <a:latin typeface="맑은 고딕"/>
+                <a:ea typeface="맑은 고딕"/>
+              </a:rPr>
+              <a:t>MAIL</a:t>
+            </a:r>
+          </a:p>
+        </p:txBody>
+      </p:sp>
+      <p:sp>
+        <p:nvSpPr>
+          <p:cNvPr id="12" name="텍스트"/>
+          <p:cNvSpPr txBox="1"/>
+          <p:nvPr/>
+        </p:nvSpPr>
+        <p:spPr>
+          <a:xfrm>
+            <a:off x="2318400" y="1166400"/>
+            <a:ext cx="972000" cy="123826"/>
+          </a:xfrm>
+          <a:prstGeom prst="rect">
+            <a:avLst/>
+          </a:prstGeom>
+          <a:noFill/>
+        </p:spPr>
+        <p:txBody>
+          <a:bodyPr wrap="square" lIns="0" rIns="0" tIns="0" bIns="0" anchor="t">
+            <a:spAutoFit/>
+          </a:bodyPr>
+          <a:lstStyle/>
+          <a:p>
+            <a:pPr algn="l">
+              <a:lnSpc>
+                <a:spcPts val="942"/>
+              </a:lnSpc>
+            </a:pPr>
+            <a:r>
+              <a:rPr sz="650" b="0">
                 <a:solidFill>
                   <a:srgbClr val="FFFFFF"/>
                 </a:solidFill>
@@ -3349,14 +3479,14 @@
       </p:sp>
       <p:sp>
         <p:nvSpPr>
-          <p:cNvPr id="9" name="텍스트"/>
+          <p:cNvPr id="13" name="텍스트"/>
           <p:cNvSpPr txBox="1"/>
           <p:nvPr/>
         </p:nvSpPr>
         <p:spPr>
           <a:xfrm>
-            <a:off x="2052000" y="1411200"/>
-            <a:ext cx="972000" cy="129541"/>
+            <a:off x="2016000" y="1321200"/>
+            <a:ext cx="302400" cy="91441"/>
           </a:xfrm>
           <a:prstGeom prst="rect">
             <a:avLst/>
@@ -3371,11 +3501,51 @@
           <a:p>
             <a:pPr algn="l">
               <a:lnSpc>
-                <a:spcPts val="986"/>
+                <a:spcPts val="696"/>
               </a:lnSpc>
             </a:pPr>
             <a:r>
-              <a:rPr sz="680" b="0">
+              <a:rPr sz="480" b="1" spc="140">
+                <a:solidFill>
+                  <a:srgbClr val="A3A9B5"/>
+                </a:solidFill>
+                <a:latin typeface="맑은 고딕"/>
+                <a:ea typeface="맑은 고딕"/>
+              </a:rPr>
+              <a:t>ADDR</a:t>
+            </a:r>
+          </a:p>
+        </p:txBody>
+      </p:sp>
+      <p:sp>
+        <p:nvSpPr>
+          <p:cNvPr id="14" name="텍스트"/>
+          <p:cNvSpPr txBox="1"/>
+          <p:nvPr/>
+        </p:nvSpPr>
+        <p:spPr>
+          <a:xfrm>
+            <a:off x="2318400" y="1310400"/>
+            <a:ext cx="972000" cy="123826"/>
+          </a:xfrm>
+          <a:prstGeom prst="rect">
+            <a:avLst/>
+          </a:prstGeom>
+          <a:noFill/>
+        </p:spPr>
+        <p:txBody>
+          <a:bodyPr wrap="square" lIns="0" rIns="0" tIns="0" bIns="0" anchor="t">
+            <a:spAutoFit/>
+          </a:bodyPr>
+          <a:lstStyle/>
+          <a:p>
+            <a:pPr algn="l">
+              <a:lnSpc>
+                <a:spcPts val="942"/>
+              </a:lnSpc>
+            </a:pPr>
+            <a:r>
+              <a:rPr sz="650" b="0">
                 <a:solidFill>
                   <a:srgbClr val="FFFFFF"/>
                 </a:solidFill>
@@ -3383,126 +3553,6 @@
                 <a:ea typeface="맑은 고딕"/>
               </a:rPr>
               <a:t>주소를 입력해 주세요</a:t>
-            </a:r>
-          </a:p>
-        </p:txBody>
-      </p:sp>
-      <p:sp>
-        <p:nvSpPr>
-          <p:cNvPr id="10" name="텍스트"/>
-          <p:cNvSpPr txBox="1"/>
-          <p:nvPr/>
-        </p:nvSpPr>
-        <p:spPr>
-          <a:xfrm>
-            <a:off x="252000" y="1526400"/>
-            <a:ext cx="216000" cy="95251"/>
-          </a:xfrm>
-          <a:prstGeom prst="rect">
-            <a:avLst/>
-          </a:prstGeom>
-          <a:noFill/>
-        </p:spPr>
-        <p:txBody>
-          <a:bodyPr wrap="square" lIns="0" rIns="0" tIns="0" bIns="0" anchor="t">
-            <a:spAutoFit/>
-          </a:bodyPr>
-          <a:lstStyle/>
-          <a:p>
-            <a:pPr algn="l">
-              <a:lnSpc>
-                <a:spcPts val="725"/>
-              </a:lnSpc>
-            </a:pPr>
-            <a:r>
-              <a:rPr sz="500" b="1" spc="120">
-                <a:solidFill>
-                  <a:srgbClr val="A3A9B5"/>
-                </a:solidFill>
-                <a:latin typeface="맑은 고딕"/>
-                <a:ea typeface="맑은 고딕"/>
-              </a:rPr>
-              <a:t>TEL</a:t>
-            </a:r>
-          </a:p>
-        </p:txBody>
-      </p:sp>
-      <p:sp>
-        <p:nvSpPr>
-          <p:cNvPr id="11" name="텍스트"/>
-          <p:cNvSpPr txBox="1"/>
-          <p:nvPr/>
-        </p:nvSpPr>
-        <p:spPr>
-          <a:xfrm>
-            <a:off x="1080000" y="1526400"/>
-            <a:ext cx="216000" cy="95251"/>
-          </a:xfrm>
-          <a:prstGeom prst="rect">
-            <a:avLst/>
-          </a:prstGeom>
-          <a:noFill/>
-        </p:spPr>
-        <p:txBody>
-          <a:bodyPr wrap="square" lIns="0" rIns="0" tIns="0" bIns="0" anchor="t">
-            <a:spAutoFit/>
-          </a:bodyPr>
-          <a:lstStyle/>
-          <a:p>
-            <a:pPr algn="l">
-              <a:lnSpc>
-                <a:spcPts val="725"/>
-              </a:lnSpc>
-            </a:pPr>
-            <a:r>
-              <a:rPr sz="500" b="1" spc="120">
-                <a:solidFill>
-                  <a:srgbClr val="A3A9B5"/>
-                </a:solidFill>
-                <a:latin typeface="맑은 고딕"/>
-                <a:ea typeface="맑은 고딕"/>
-              </a:rPr>
-              <a:t>MAIL</a:t>
-            </a:r>
-          </a:p>
-        </p:txBody>
-      </p:sp>
-      <p:sp>
-        <p:nvSpPr>
-          <p:cNvPr id="12" name="텍스트"/>
-          <p:cNvSpPr txBox="1"/>
-          <p:nvPr/>
-        </p:nvSpPr>
-        <p:spPr>
-          <a:xfrm>
-            <a:off x="2052000" y="1526400"/>
-            <a:ext cx="216000" cy="95251"/>
-          </a:xfrm>
-          <a:prstGeom prst="rect">
-            <a:avLst/>
-          </a:prstGeom>
-          <a:noFill/>
-        </p:spPr>
-        <p:txBody>
-          <a:bodyPr wrap="square" lIns="0" rIns="0" tIns="0" bIns="0" anchor="t">
-            <a:spAutoFit/>
-          </a:bodyPr>
-          <a:lstStyle/>
-          <a:p>
-            <a:pPr algn="l">
-              <a:lnSpc>
-                <a:spcPts val="725"/>
-              </a:lnSpc>
-            </a:pPr>
-            <a:r>
-              <a:rPr sz="500" b="1" spc="120">
-                <a:solidFill>
-                  <a:srgbClr val="A3A9B5"/>
-                </a:solidFill>
-                <a:latin typeface="맑은 고딕"/>
-                <a:ea typeface="맑은 고딕"/>
-              </a:rPr>
-              <a:t>ADDR</a:t>
             </a:r>
           </a:p>
         </p:txBody>
@@ -3533,22 +3583,548 @@
         <p:nvPr/>
       </p:nvGrpSpPr>
       <p:grpSpPr/>
-      <p:sp>
-        <p:nvSpPr>
-          <p:cNvPr id="2" name="Rectangle 1"/>
-          <p:cNvSpPr/>
+      <p:cxnSp>
+        <p:nvCxnSpPr>
+          <p:cNvPr id="2" name="Connector 1"/>
+          <p:cNvCxnSpPr/>
           <p:nvPr/>
-        </p:nvSpPr>
-        <p:spPr>
-          <a:xfrm>
-            <a:off x="2304000" y="504000"/>
-            <a:ext cx="684000" cy="684000"/>
+        </p:nvCxnSpPr>
+        <p:spPr>
+          <a:xfrm>
+            <a:off x="396000" y="360000"/>
+            <a:ext cx="0" cy="648000"/>
+          </a:xfrm>
+          <a:prstGeom prst="line">
+            <a:avLst/>
+          </a:prstGeom>
+          <a:ln w="5760">
+            <a:solidFill>
+              <a:srgbClr val="3A6FFF"/>
+            </a:solidFill>
+          </a:ln>
+        </p:spPr>
+      </p:cxnSp>
+      <p:sp>
+        <p:nvSpPr>
+          <p:cNvPr id="3" name="텍스트"/>
+          <p:cNvSpPr txBox="1"/>
+          <p:nvPr/>
+        </p:nvSpPr>
+        <p:spPr>
+          <a:xfrm>
+            <a:off x="252000" y="187200"/>
+            <a:ext cx="1440000" cy="99061"/>
           </a:xfrm>
           <a:prstGeom prst="rect">
             <a:avLst/>
           </a:prstGeom>
           <a:noFill/>
-          <a:ln w="7200">
+        </p:spPr>
+        <p:txBody>
+          <a:bodyPr wrap="square" lIns="0" rIns="0" tIns="0" bIns="0" anchor="t">
+            <a:spAutoFit/>
+          </a:bodyPr>
+          <a:lstStyle/>
+          <a:p>
+            <a:pPr algn="l">
+              <a:lnSpc>
+                <a:spcPts val="754"/>
+              </a:lnSpc>
+            </a:pPr>
+            <a:r>
+              <a:rPr sz="520" b="1" spc="240">
+                <a:solidFill>
+                  <a:srgbClr val="A3A9B5"/>
+                </a:solidFill>
+                <a:latin typeface="맑은 고딕"/>
+                <a:ea typeface="맑은 고딕"/>
+              </a:rPr>
+              <a:t>취급 품목</a:t>
+            </a:r>
+          </a:p>
+        </p:txBody>
+      </p:sp>
+      <p:sp>
+        <p:nvSpPr>
+          <p:cNvPr id="4" name="Oval 3"/>
+          <p:cNvSpPr/>
+          <p:nvPr/>
+        </p:nvSpPr>
+        <p:spPr>
+          <a:xfrm>
+            <a:off x="367200" y="374400"/>
+            <a:ext cx="57600" cy="57600"/>
+          </a:xfrm>
+          <a:prstGeom prst="ellipse">
+            <a:avLst/>
+          </a:prstGeom>
+          <a:solidFill>
+            <a:srgbClr val="3A6FFF"/>
+          </a:solidFill>
+          <a:ln w="5760">
+            <a:solidFill>
+              <a:srgbClr val="3A6FFF"/>
+            </a:solidFill>
+          </a:ln>
+        </p:spPr>
+        <p:txBody>
+          <a:bodyPr rtlCol="0" anchor="ctr"/>
+          <a:lstStyle/>
+          <a:p>
+            <a:pPr algn="ctr"/>
+          </a:p>
+        </p:txBody>
+      </p:sp>
+      <p:sp>
+        <p:nvSpPr>
+          <p:cNvPr id="5" name="텍스트"/>
+          <p:cNvSpPr txBox="1"/>
+          <p:nvPr/>
+        </p:nvSpPr>
+        <p:spPr>
+          <a:xfrm>
+            <a:off x="540000" y="331200"/>
+            <a:ext cx="1512000" cy="158400"/>
+          </a:xfrm>
+          <a:prstGeom prst="rect">
+            <a:avLst/>
+          </a:prstGeom>
+          <a:noFill/>
+        </p:spPr>
+        <p:txBody>
+          <a:bodyPr wrap="square" lIns="0" rIns="0" tIns="0" bIns="0" anchor="t">
+            <a:spAutoFit/>
+          </a:bodyPr>
+          <a:lstStyle/>
+          <a:p>
+            <a:pPr algn="l">
+              <a:lnSpc>
+                <a:spcPts val="1073"/>
+              </a:lnSpc>
+            </a:pPr>
+            <a:r>
+              <a:rPr sz="740" b="1">
+                <a:solidFill>
+                  <a:srgbClr val="FFFFFF"/>
+                </a:solidFill>
+                <a:latin typeface="맑은 고딕"/>
+                <a:ea typeface="맑은 고딕"/>
+              </a:rPr>
+              <a:t>소품 · 문구</a:t>
+            </a:r>
+          </a:p>
+        </p:txBody>
+      </p:sp>
+      <p:sp>
+        <p:nvSpPr>
+          <p:cNvPr id="6" name="Oval 5"/>
+          <p:cNvSpPr/>
+          <p:nvPr/>
+        </p:nvSpPr>
+        <p:spPr>
+          <a:xfrm>
+            <a:off x="367200" y="597600"/>
+            <a:ext cx="57600" cy="57600"/>
+          </a:xfrm>
+          <a:prstGeom prst="ellipse">
+            <a:avLst/>
+          </a:prstGeom>
+          <a:solidFill>
+            <a:srgbClr val="0E1116"/>
+          </a:solidFill>
+          <a:ln w="5760">
+            <a:solidFill>
+              <a:srgbClr val="3A6FFF"/>
+            </a:solidFill>
+          </a:ln>
+        </p:spPr>
+        <p:txBody>
+          <a:bodyPr rtlCol="0" anchor="ctr"/>
+          <a:lstStyle/>
+          <a:p>
+            <a:pPr algn="ctr"/>
+          </a:p>
+        </p:txBody>
+      </p:sp>
+      <p:sp>
+        <p:nvSpPr>
+          <p:cNvPr id="7" name="텍스트"/>
+          <p:cNvSpPr txBox="1"/>
+          <p:nvPr/>
+        </p:nvSpPr>
+        <p:spPr>
+          <a:xfrm>
+            <a:off x="540000" y="554400"/>
+            <a:ext cx="1512000" cy="158400"/>
+          </a:xfrm>
+          <a:prstGeom prst="rect">
+            <a:avLst/>
+          </a:prstGeom>
+          <a:noFill/>
+        </p:spPr>
+        <p:txBody>
+          <a:bodyPr wrap="square" lIns="0" rIns="0" tIns="0" bIns="0" anchor="t">
+            <a:spAutoFit/>
+          </a:bodyPr>
+          <a:lstStyle/>
+          <a:p>
+            <a:pPr algn="l">
+              <a:lnSpc>
+                <a:spcPts val="1073"/>
+              </a:lnSpc>
+            </a:pPr>
+            <a:r>
+              <a:rPr sz="740" b="1">
+                <a:solidFill>
+                  <a:srgbClr val="FFFFFF"/>
+                </a:solidFill>
+                <a:latin typeface="맑은 고딕"/>
+                <a:ea typeface="맑은 고딕"/>
+              </a:rPr>
+              <a:t>가구 제작</a:t>
+            </a:r>
+          </a:p>
+        </p:txBody>
+      </p:sp>
+      <p:sp>
+        <p:nvSpPr>
+          <p:cNvPr id="8" name="Oval 7"/>
+          <p:cNvSpPr/>
+          <p:nvPr/>
+        </p:nvSpPr>
+        <p:spPr>
+          <a:xfrm>
+            <a:off x="367200" y="820800"/>
+            <a:ext cx="57600" cy="57600"/>
+          </a:xfrm>
+          <a:prstGeom prst="ellipse">
+            <a:avLst/>
+          </a:prstGeom>
+          <a:solidFill>
+            <a:srgbClr val="0E1116"/>
+          </a:solidFill>
+          <a:ln w="5760">
+            <a:solidFill>
+              <a:srgbClr val="3A6FFF"/>
+            </a:solidFill>
+          </a:ln>
+        </p:spPr>
+        <p:txBody>
+          <a:bodyPr rtlCol="0" anchor="ctr"/>
+          <a:lstStyle/>
+          <a:p>
+            <a:pPr algn="ctr"/>
+          </a:p>
+        </p:txBody>
+      </p:sp>
+      <p:sp>
+        <p:nvSpPr>
+          <p:cNvPr id="9" name="텍스트"/>
+          <p:cNvSpPr txBox="1"/>
+          <p:nvPr/>
+        </p:nvSpPr>
+        <p:spPr>
+          <a:xfrm>
+            <a:off x="540000" y="777600"/>
+            <a:ext cx="1512000" cy="158400"/>
+          </a:xfrm>
+          <a:prstGeom prst="rect">
+            <a:avLst/>
+          </a:prstGeom>
+          <a:noFill/>
+        </p:spPr>
+        <p:txBody>
+          <a:bodyPr wrap="square" lIns="0" rIns="0" tIns="0" bIns="0" anchor="t">
+            <a:spAutoFit/>
+          </a:bodyPr>
+          <a:lstStyle/>
+          <a:p>
+            <a:pPr algn="l">
+              <a:lnSpc>
+                <a:spcPts val="1073"/>
+              </a:lnSpc>
+            </a:pPr>
+            <a:r>
+              <a:rPr sz="740" b="1">
+                <a:solidFill>
+                  <a:srgbClr val="FFFFFF"/>
+                </a:solidFill>
+                <a:latin typeface="맑은 고딕"/>
+                <a:ea typeface="맑은 고딕"/>
+              </a:rPr>
+              <a:t>이사 정리</a:t>
+            </a:r>
+          </a:p>
+        </p:txBody>
+      </p:sp>
+      <p:sp>
+        <p:nvSpPr>
+          <p:cNvPr id="10" name="Oval 9"/>
+          <p:cNvSpPr/>
+          <p:nvPr/>
+        </p:nvSpPr>
+        <p:spPr>
+          <a:xfrm>
+            <a:off x="367200" y="1044000"/>
+            <a:ext cx="57600" cy="57600"/>
+          </a:xfrm>
+          <a:prstGeom prst="ellipse">
+            <a:avLst/>
+          </a:prstGeom>
+          <a:solidFill>
+            <a:srgbClr val="0E1116"/>
+          </a:solidFill>
+          <a:ln w="5760">
+            <a:solidFill>
+              <a:srgbClr val="3A6FFF"/>
+            </a:solidFill>
+          </a:ln>
+        </p:spPr>
+        <p:txBody>
+          <a:bodyPr rtlCol="0" anchor="ctr"/>
+          <a:lstStyle/>
+          <a:p>
+            <a:pPr algn="ctr"/>
+          </a:p>
+        </p:txBody>
+      </p:sp>
+      <p:sp>
+        <p:nvSpPr>
+          <p:cNvPr id="11" name="텍스트"/>
+          <p:cNvSpPr txBox="1"/>
+          <p:nvPr/>
+        </p:nvSpPr>
+        <p:spPr>
+          <a:xfrm>
+            <a:off x="540000" y="1000800"/>
+            <a:ext cx="1512000" cy="158400"/>
+          </a:xfrm>
+          <a:prstGeom prst="rect">
+            <a:avLst/>
+          </a:prstGeom>
+          <a:noFill/>
+        </p:spPr>
+        <p:txBody>
+          <a:bodyPr wrap="square" lIns="0" rIns="0" tIns="0" bIns="0" anchor="t">
+            <a:spAutoFit/>
+          </a:bodyPr>
+          <a:lstStyle/>
+          <a:p>
+            <a:pPr algn="l">
+              <a:lnSpc>
+                <a:spcPts val="1073"/>
+              </a:lnSpc>
+            </a:pPr>
+            <a:r>
+              <a:rPr sz="740" b="1">
+                <a:solidFill>
+                  <a:srgbClr val="FFFFFF"/>
+                </a:solidFill>
+                <a:latin typeface="맑은 고딕"/>
+                <a:ea typeface="맑은 고딕"/>
+              </a:rPr>
+              <a:t>방문 견적</a:t>
+            </a:r>
+          </a:p>
+        </p:txBody>
+      </p:sp>
+      <p:cxnSp>
+        <p:nvCxnSpPr>
+          <p:cNvPr id="12" name="Connector 11"/>
+          <p:cNvCxnSpPr/>
+          <p:nvPr/>
+        </p:nvCxnSpPr>
+        <p:spPr>
+          <a:xfrm>
+            <a:off x="2232000" y="345600"/>
+            <a:ext cx="0" cy="1166400"/>
+          </a:xfrm>
+          <a:prstGeom prst="line">
+            <a:avLst/>
+          </a:prstGeom>
+          <a:ln w="3600">
+            <a:solidFill>
+              <a:srgbClr val="2A2F38"/>
+            </a:solidFill>
+          </a:ln>
+        </p:spPr>
+      </p:cxnSp>
+      <p:sp>
+        <p:nvSpPr>
+          <p:cNvPr id="13" name="텍스트"/>
+          <p:cNvSpPr txBox="1"/>
+          <p:nvPr/>
+        </p:nvSpPr>
+        <p:spPr>
+          <a:xfrm>
+            <a:off x="2376000" y="396000"/>
+            <a:ext cx="648000" cy="91441"/>
+          </a:xfrm>
+          <a:prstGeom prst="rect">
+            <a:avLst/>
+          </a:prstGeom>
+          <a:noFill/>
+        </p:spPr>
+        <p:txBody>
+          <a:bodyPr wrap="square" lIns="0" rIns="0" tIns="0" bIns="0" anchor="t">
+            <a:spAutoFit/>
+          </a:bodyPr>
+          <a:lstStyle/>
+          <a:p>
+            <a:pPr algn="l">
+              <a:lnSpc>
+                <a:spcPts val="696"/>
+              </a:lnSpc>
+            </a:pPr>
+            <a:r>
+              <a:rPr sz="480" b="1" spc="140">
+                <a:solidFill>
+                  <a:srgbClr val="A3A9B5"/>
+                </a:solidFill>
+                <a:latin typeface="맑은 고딕"/>
+                <a:ea typeface="맑은 고딕"/>
+              </a:rPr>
+              <a:t>HOURS</a:t>
+            </a:r>
+          </a:p>
+        </p:txBody>
+      </p:sp>
+      <p:sp>
+        <p:nvSpPr>
+          <p:cNvPr id="14" name="텍스트"/>
+          <p:cNvSpPr txBox="1"/>
+          <p:nvPr/>
+        </p:nvSpPr>
+        <p:spPr>
+          <a:xfrm>
+            <a:off x="2376000" y="511200"/>
+            <a:ext cx="720000" cy="118111"/>
+          </a:xfrm>
+          <a:prstGeom prst="rect">
+            <a:avLst/>
+          </a:prstGeom>
+          <a:noFill/>
+        </p:spPr>
+        <p:txBody>
+          <a:bodyPr wrap="square" lIns="0" rIns="0" tIns="0" bIns="0" anchor="t">
+            <a:spAutoFit/>
+          </a:bodyPr>
+          <a:lstStyle/>
+          <a:p>
+            <a:pPr algn="l">
+              <a:lnSpc>
+                <a:spcPts val="899"/>
+              </a:lnSpc>
+            </a:pPr>
+            <a:r>
+              <a:rPr sz="620" b="0">
+                <a:solidFill>
+                  <a:srgbClr val="FFFFFF"/>
+                </a:solidFill>
+                <a:latin typeface="맑은 고딕"/>
+                <a:ea typeface="맑은 고딕"/>
+              </a:rPr>
+              <a:t>평일 09:00 – 19:00</a:t>
+            </a:r>
+          </a:p>
+        </p:txBody>
+      </p:sp>
+      <p:sp>
+        <p:nvSpPr>
+          <p:cNvPr id="15" name="텍스트"/>
+          <p:cNvSpPr txBox="1"/>
+          <p:nvPr/>
+        </p:nvSpPr>
+        <p:spPr>
+          <a:xfrm>
+            <a:off x="2376000" y="835200"/>
+            <a:ext cx="648000" cy="91441"/>
+          </a:xfrm>
+          <a:prstGeom prst="rect">
+            <a:avLst/>
+          </a:prstGeom>
+          <a:noFill/>
+        </p:spPr>
+        <p:txBody>
+          <a:bodyPr wrap="square" lIns="0" rIns="0" tIns="0" bIns="0" anchor="t">
+            <a:spAutoFit/>
+          </a:bodyPr>
+          <a:lstStyle/>
+          <a:p>
+            <a:pPr algn="l">
+              <a:lnSpc>
+                <a:spcPts val="696"/>
+              </a:lnSpc>
+            </a:pPr>
+            <a:r>
+              <a:rPr sz="480" b="1" spc="140">
+                <a:solidFill>
+                  <a:srgbClr val="A3A9B5"/>
+                </a:solidFill>
+                <a:latin typeface="맑은 고딕"/>
+                <a:ea typeface="맑은 고딕"/>
+              </a:rPr>
+              <a:t>WEB</a:t>
+            </a:r>
+          </a:p>
+        </p:txBody>
+      </p:sp>
+      <p:sp>
+        <p:nvSpPr>
+          <p:cNvPr id="16" name="텍스트"/>
+          <p:cNvSpPr txBox="1"/>
+          <p:nvPr/>
+        </p:nvSpPr>
+        <p:spPr>
+          <a:xfrm>
+            <a:off x="2376000" y="950400"/>
+            <a:ext cx="684000" cy="118111"/>
+          </a:xfrm>
+          <a:prstGeom prst="rect">
+            <a:avLst/>
+          </a:prstGeom>
+          <a:noFill/>
+        </p:spPr>
+        <p:txBody>
+          <a:bodyPr wrap="square" lIns="0" rIns="0" tIns="0" bIns="0" anchor="t">
+            <a:spAutoFit/>
+          </a:bodyPr>
+          <a:lstStyle/>
+          <a:p>
+            <a:pPr algn="l">
+              <a:lnSpc>
+                <a:spcPts val="899"/>
+              </a:lnSpc>
+            </a:pPr>
+            <a:r>
+              <a:rPr sz="620" b="0">
+                <a:solidFill>
+                  <a:srgbClr val="FFFFFF"/>
+                </a:solidFill>
+                <a:latin typeface="맑은 고딕"/>
+                <a:ea typeface="맑은 고딕"/>
+              </a:rPr>
+              <a:t>www.example.com</a:t>
+            </a:r>
+          </a:p>
+        </p:txBody>
+      </p:sp>
+      <p:sp>
+        <p:nvSpPr>
+          <p:cNvPr id="17" name="Rectangle 16"/>
+          <p:cNvSpPr/>
+          <p:nvPr/>
+        </p:nvSpPr>
+        <p:spPr>
+          <a:xfrm>
+            <a:off x="2376000" y="1224000"/>
+            <a:ext cx="237600" cy="237600"/>
+          </a:xfrm>
+          <a:prstGeom prst="rect">
+            <a:avLst/>
+          </a:prstGeom>
+          <a:noFill/>
+          <a:ln w="4320">
             <a:solidFill>
               <a:srgbClr val="A3A9B5"/>
             </a:solidFill>
@@ -3565,14 +4141,14 @@
       </p:sp>
       <p:sp>
         <p:nvSpPr>
-          <p:cNvPr id="3" name="텍스트"/>
+          <p:cNvPr id="18" name="텍스트"/>
           <p:cNvSpPr txBox="1"/>
           <p:nvPr/>
         </p:nvSpPr>
         <p:spPr>
           <a:xfrm>
-            <a:off x="2304000" y="504000"/>
-            <a:ext cx="684000" cy="684000"/>
+            <a:off x="2376000" y="1224000"/>
+            <a:ext cx="237600" cy="237600"/>
           </a:xfrm>
           <a:prstGeom prst="rect">
             <a:avLst/>
@@ -3587,11 +4163,11 @@
           <a:p>
             <a:pPr algn="ctr">
               <a:lnSpc>
-                <a:spcPts val="1595"/>
+                <a:spcPts val="725"/>
               </a:lnSpc>
             </a:pPr>
             <a:r>
-              <a:rPr sz="1100" b="1">
+              <a:rPr sz="500" b="1">
                 <a:solidFill>
                   <a:srgbClr val="A3A9B5"/>
                 </a:solidFill>
@@ -3599,132 +4175,6 @@
                 <a:ea typeface="맑은 고딕"/>
               </a:rPr>
               <a:t>QR</a:t>
-            </a:r>
-          </a:p>
-        </p:txBody>
-      </p:sp>
-      <p:sp>
-        <p:nvSpPr>
-          <p:cNvPr id="4" name="텍스트"/>
-          <p:cNvSpPr txBox="1"/>
-          <p:nvPr/>
-        </p:nvSpPr>
-        <p:spPr>
-          <a:xfrm>
-            <a:off x="252000" y="504000"/>
-            <a:ext cx="1728000" cy="720000"/>
-          </a:xfrm>
-          <a:prstGeom prst="rect">
-            <a:avLst/>
-          </a:prstGeom>
-          <a:noFill/>
-        </p:spPr>
-        <p:txBody>
-          <a:bodyPr wrap="square" lIns="0" rIns="0" tIns="0" bIns="0" anchor="t">
-            <a:spAutoFit/>
-          </a:bodyPr>
-          <a:lstStyle/>
-          <a:p>
-            <a:pPr algn="l">
-              <a:lnSpc>
-                <a:spcPts val="1739"/>
-              </a:lnSpc>
-            </a:pPr>
-            <a:r>
-              <a:rPr sz="1200" b="1">
-                <a:solidFill>
-                  <a:srgbClr val="FFFFFF"/>
-                </a:solidFill>
-                <a:latin typeface="맑은 고딕"/>
-                <a:ea typeface="맑은 고딕"/>
-              </a:rPr>
-              <a:t>오래된 인연처럼</a:t>
-            </a:r>
-          </a:p>
-          <a:p>
-            <a:pPr algn="l">
-              <a:lnSpc>
-                <a:spcPts val="1739"/>
-              </a:lnSpc>
-            </a:pPr>
-            <a:r>
-              <a:rPr sz="1200" b="1">
-                <a:solidFill>
-                  <a:srgbClr val="FFFFFF"/>
-                </a:solidFill>
-                <a:latin typeface="맑은 고딕"/>
-                <a:ea typeface="맑은 고딕"/>
-              </a:rPr>
-              <a:t>편안한 곳</a:t>
-            </a:r>
-          </a:p>
-        </p:txBody>
-      </p:sp>
-      <p:sp>
-        <p:nvSpPr>
-          <p:cNvPr id="5" name="Rectangle 4"/>
-          <p:cNvSpPr/>
-          <p:nvPr/>
-        </p:nvSpPr>
-        <p:spPr>
-          <a:xfrm>
-            <a:off x="252000" y="1296000"/>
-            <a:ext cx="144000" cy="18000"/>
-          </a:xfrm>
-          <a:prstGeom prst="rect">
-            <a:avLst/>
-          </a:prstGeom>
-          <a:solidFill>
-            <a:srgbClr val="3A6FFF"/>
-          </a:solidFill>
-          <a:ln>
-            <a:noFill/>
-          </a:ln>
-        </p:spPr>
-        <p:txBody>
-          <a:bodyPr rtlCol="0" anchor="ctr"/>
-          <a:lstStyle/>
-          <a:p>
-            <a:pPr algn="ctr"/>
-          </a:p>
-        </p:txBody>
-      </p:sp>
-      <p:sp>
-        <p:nvSpPr>
-          <p:cNvPr id="6" name="텍스트"/>
-          <p:cNvSpPr txBox="1"/>
-          <p:nvPr/>
-        </p:nvSpPr>
-        <p:spPr>
-          <a:xfrm>
-            <a:off x="252000" y="1404000"/>
-            <a:ext cx="1656000" cy="133351"/>
-          </a:xfrm>
-          <a:prstGeom prst="rect">
-            <a:avLst/>
-          </a:prstGeom>
-          <a:noFill/>
-        </p:spPr>
-        <p:txBody>
-          <a:bodyPr wrap="square" lIns="0" rIns="0" tIns="0" bIns="0" anchor="t">
-            <a:spAutoFit/>
-          </a:bodyPr>
-          <a:lstStyle/>
-          <a:p>
-            <a:pPr algn="l">
-              <a:lnSpc>
-                <a:spcPts val="1015"/>
-              </a:lnSpc>
-            </a:pPr>
-            <a:r>
-              <a:rPr sz="700" b="1" spc="200">
-                <a:solidFill>
-                  <a:srgbClr val="A3A9B5"/>
-                </a:solidFill>
-                <a:latin typeface="맑은 고딕"/>
-                <a:ea typeface="맑은 고딕"/>
-              </a:rPr>
-              <a:t>상호명</a:t>
             </a:r>
           </a:p>
         </p:txBody>
